--- a/RESEARCH METHODOLOGY/ANOVA and T-test.pptx
+++ b/RESEARCH METHODOLOGY/ANOVA and T-test.pptx
@@ -5,48 +5,47 @@
     <p:sldMasterId id="2147483648" r:id="rId4"/>
   </p:sldMasterIdLst>
   <p:notesMasterIdLst>
-    <p:notesMasterId r:id="rId41"/>
+    <p:notesMasterId r:id="rId40"/>
   </p:notesMasterIdLst>
   <p:handoutMasterIdLst>
-    <p:handoutMasterId r:id="rId42"/>
+    <p:handoutMasterId r:id="rId41"/>
   </p:handoutMasterIdLst>
   <p:sldIdLst>
     <p:sldId id="256" r:id="rId5"/>
-    <p:sldId id="320" r:id="rId6"/>
-    <p:sldId id="257" r:id="rId7"/>
-    <p:sldId id="286" r:id="rId8"/>
-    <p:sldId id="318" r:id="rId9"/>
-    <p:sldId id="319" r:id="rId10"/>
-    <p:sldId id="258" r:id="rId11"/>
-    <p:sldId id="287" r:id="rId12"/>
-    <p:sldId id="315" r:id="rId13"/>
-    <p:sldId id="288" r:id="rId14"/>
-    <p:sldId id="312" r:id="rId15"/>
-    <p:sldId id="313" r:id="rId16"/>
-    <p:sldId id="291" r:id="rId17"/>
-    <p:sldId id="304" r:id="rId18"/>
-    <p:sldId id="305" r:id="rId19"/>
-    <p:sldId id="306" r:id="rId20"/>
-    <p:sldId id="317" r:id="rId21"/>
-    <p:sldId id="307" r:id="rId22"/>
-    <p:sldId id="308" r:id="rId23"/>
-    <p:sldId id="309" r:id="rId24"/>
-    <p:sldId id="310" r:id="rId25"/>
-    <p:sldId id="292" r:id="rId26"/>
-    <p:sldId id="293" r:id="rId27"/>
-    <p:sldId id="294" r:id="rId28"/>
-    <p:sldId id="296" r:id="rId29"/>
-    <p:sldId id="297" r:id="rId30"/>
-    <p:sldId id="295" r:id="rId31"/>
-    <p:sldId id="298" r:id="rId32"/>
-    <p:sldId id="299" r:id="rId33"/>
-    <p:sldId id="300" r:id="rId34"/>
-    <p:sldId id="266" r:id="rId35"/>
-    <p:sldId id="301" r:id="rId36"/>
-    <p:sldId id="302" r:id="rId37"/>
-    <p:sldId id="303" r:id="rId38"/>
-    <p:sldId id="316" r:id="rId39"/>
-    <p:sldId id="268" r:id="rId40"/>
+    <p:sldId id="257" r:id="rId6"/>
+    <p:sldId id="286" r:id="rId7"/>
+    <p:sldId id="318" r:id="rId8"/>
+    <p:sldId id="319" r:id="rId9"/>
+    <p:sldId id="258" r:id="rId10"/>
+    <p:sldId id="287" r:id="rId11"/>
+    <p:sldId id="315" r:id="rId12"/>
+    <p:sldId id="288" r:id="rId13"/>
+    <p:sldId id="312" r:id="rId14"/>
+    <p:sldId id="313" r:id="rId15"/>
+    <p:sldId id="291" r:id="rId16"/>
+    <p:sldId id="304" r:id="rId17"/>
+    <p:sldId id="305" r:id="rId18"/>
+    <p:sldId id="306" r:id="rId19"/>
+    <p:sldId id="317" r:id="rId20"/>
+    <p:sldId id="307" r:id="rId21"/>
+    <p:sldId id="308" r:id="rId22"/>
+    <p:sldId id="309" r:id="rId23"/>
+    <p:sldId id="310" r:id="rId24"/>
+    <p:sldId id="292" r:id="rId25"/>
+    <p:sldId id="293" r:id="rId26"/>
+    <p:sldId id="294" r:id="rId27"/>
+    <p:sldId id="296" r:id="rId28"/>
+    <p:sldId id="297" r:id="rId29"/>
+    <p:sldId id="295" r:id="rId30"/>
+    <p:sldId id="298" r:id="rId31"/>
+    <p:sldId id="299" r:id="rId32"/>
+    <p:sldId id="300" r:id="rId33"/>
+    <p:sldId id="266" r:id="rId34"/>
+    <p:sldId id="301" r:id="rId35"/>
+    <p:sldId id="302" r:id="rId36"/>
+    <p:sldId id="303" r:id="rId37"/>
+    <p:sldId id="316" r:id="rId38"/>
+    <p:sldId id="268" r:id="rId39"/>
   </p:sldIdLst>
   <p:sldSz cx="12192000" cy="6858000"/>
   <p:notesSz cx="6858000" cy="9144000"/>
@@ -170,7 +169,7 @@
 <file path=ppt/revisionInfo.xml><?xml version="1.0" encoding="utf-8"?>
 <p1510:revInfo xmlns:a="http://schemas.openxmlformats.org/drawingml/2006/main" xmlns:r="http://schemas.openxmlformats.org/officeDocument/2006/relationships" xmlns:p1510="http://schemas.microsoft.com/office/powerpoint/2015/10/main">
   <p1510:revLst>
-    <p1510:client id="{5E8492CA-A953-372B-9F93-518F19B4375A}" v="1" dt="2024-11-28T09:49:12.960"/>
+    <p1510:client id="{A17A1E46-7186-976E-FA62-FE05E2938E43}" v="1" dt="2024-11-19T02:33:25.496"/>
   </p1510:revLst>
 </p1510:revInfo>
 </file>
@@ -269,7 +268,7 @@
           <a:p>
             <a:fld id="{1CA5457B-CDAE-4DEB-AEC8-C82DE2312E37}" type="datetimeFigureOut">
               <a:rPr lang="en-US" smtClean="0"/>
-              <a:t>11/28/2024</a:t>
+              <a:t>11/18/2024</a:t>
             </a:fld>
             <a:endParaRPr lang="en-US" dirty="0"/>
           </a:p>
@@ -446,7 +445,7 @@
           <a:p>
             <a:fld id="{090B78EA-28CE-41D8-9043-90E391E5F567}" type="datetimeFigureOut">
               <a:rPr lang="en-US" noProof="0" smtClean="0"/>
-              <a:t>11/28/2024</a:t>
+              <a:t>11/18/2024</a:t>
             </a:fld>
             <a:endParaRPr lang="en-US" noProof="0" dirty="0"/>
           </a:p>
@@ -25721,151 +25720,6 @@
         <p:spPr>
           <a:xfrm>
             <a:off x="444500" y="542925"/>
-            <a:ext cx="11214100" cy="480131"/>
-          </a:xfrm>
-        </p:spPr>
-        <p:txBody>
-          <a:bodyPr/>
-          <a:lstStyle/>
-          <a:p>
-            <a:r>
-              <a:rPr lang="en-US" sz="2800" dirty="0">
-                <a:latin typeface="Times New Roman" panose="02020603050405020304" pitchFamily="18" charset="0"/>
-                <a:cs typeface="Times New Roman" panose="02020603050405020304" pitchFamily="18" charset="0"/>
-              </a:rPr>
-              <a:t>Types of ANOVA</a:t>
-            </a:r>
-          </a:p>
-        </p:txBody>
-      </p:sp>
-      <p:sp>
-        <p:nvSpPr>
-          <p:cNvPr id="3" name="Slide Number Placeholder 2"/>
-          <p:cNvSpPr>
-            <a:spLocks noGrp="1"/>
-          </p:cNvSpPr>
-          <p:nvPr>
-            <p:ph type="sldNum" sz="quarter" idx="12"/>
-          </p:nvPr>
-        </p:nvSpPr>
-        <p:spPr/>
-        <p:txBody>
-          <a:bodyPr/>
-          <a:lstStyle/>
-          <a:p>
-            <a:fld id="{C263D6C4-4840-40CC-AC84-17E24B3B7BDE}" type="slidenum">
-              <a:rPr lang="en-US" noProof="0" smtClean="0"/>
-              <a:pPr/>
-              <a:t>10</a:t>
-            </a:fld>
-            <a:endParaRPr lang="en-US" noProof="0" dirty="0"/>
-          </a:p>
-        </p:txBody>
-      </p:sp>
-      <p:sp>
-        <p:nvSpPr>
-          <p:cNvPr id="4" name="Text Placeholder 3"/>
-          <p:cNvSpPr>
-            <a:spLocks noGrp="1"/>
-          </p:cNvSpPr>
-          <p:nvPr>
-            <p:ph type="body" sz="quarter" idx="13"/>
-          </p:nvPr>
-        </p:nvSpPr>
-        <p:spPr/>
-        <p:txBody>
-          <a:bodyPr/>
-          <a:lstStyle/>
-          <a:p>
-            <a:r>
-              <a:rPr lang="en-US" sz="2400" dirty="0">
-                <a:latin typeface="Times New Roman" panose="02020603050405020304" pitchFamily="18" charset="0"/>
-                <a:cs typeface="Times New Roman" panose="02020603050405020304" pitchFamily="18" charset="0"/>
-              </a:rPr>
-              <a:t>One Way ANOVA</a:t>
-            </a:r>
-          </a:p>
-          <a:p>
-            <a:endParaRPr lang="en-US" sz="2400" dirty="0">
-              <a:latin typeface="Times New Roman" panose="02020603050405020304" pitchFamily="18" charset="0"/>
-              <a:cs typeface="Times New Roman" panose="02020603050405020304" pitchFamily="18" charset="0"/>
-            </a:endParaRPr>
-          </a:p>
-        </p:txBody>
-      </p:sp>
-      <p:pic>
-        <p:nvPicPr>
-          <p:cNvPr id="5" name="Content Placeholder 3">
-            <a:extLst>
-              <a:ext uri="{FF2B5EF4-FFF2-40B4-BE49-F238E27FC236}">
-                <a16:creationId xmlns:a16="http://schemas.microsoft.com/office/drawing/2014/main" id="{8969E46E-97C4-E080-1F0D-50C2454CF966}"/>
-              </a:ext>
-            </a:extLst>
-          </p:cNvPr>
-          <p:cNvPicPr>
-            <a:picLocks noChangeAspect="1"/>
-          </p:cNvPicPr>
-          <p:nvPr/>
-        </p:nvPicPr>
-        <p:blipFill>
-          <a:blip r:embed="rId2"/>
-          <a:stretch>
-            <a:fillRect/>
-          </a:stretch>
-        </p:blipFill>
-        <p:spPr>
-          <a:xfrm>
-            <a:off x="2030218" y="2347545"/>
-            <a:ext cx="7912514" cy="4079775"/>
-          </a:xfrm>
-          <a:prstGeom prst="rect">
-            <a:avLst/>
-          </a:prstGeom>
-        </p:spPr>
-      </p:pic>
-    </p:spTree>
-    <p:extLst>
-      <p:ext uri="{BB962C8B-B14F-4D97-AF65-F5344CB8AC3E}">
-        <p14:creationId xmlns:p14="http://schemas.microsoft.com/office/powerpoint/2010/main" val="3054131739"/>
-      </p:ext>
-    </p:extLst>
-  </p:cSld>
-  <p:clrMapOvr>
-    <a:masterClrMapping/>
-  </p:clrMapOvr>
-</p:sld>
-</file>
-
-<file path=ppt/slides/slide11.xml><?xml version="1.0" encoding="utf-8"?>
-<p:sld xmlns:a="http://schemas.openxmlformats.org/drawingml/2006/main" xmlns:r="http://schemas.openxmlformats.org/officeDocument/2006/relationships" xmlns:p="http://schemas.openxmlformats.org/presentationml/2006/main">
-  <p:cSld>
-    <p:spTree>
-      <p:nvGrpSpPr>
-        <p:cNvPr id="1" name=""/>
-        <p:cNvGrpSpPr/>
-        <p:nvPr/>
-      </p:nvGrpSpPr>
-      <p:grpSpPr>
-        <a:xfrm>
-          <a:off x="0" y="0"/>
-          <a:ext cx="0" cy="0"/>
-          <a:chOff x="0" y="0"/>
-          <a:chExt cx="0" cy="0"/>
-        </a:xfrm>
-      </p:grpSpPr>
-      <p:sp>
-        <p:nvSpPr>
-          <p:cNvPr id="2" name="Title 1"/>
-          <p:cNvSpPr>
-            <a:spLocks noGrp="1"/>
-          </p:cNvSpPr>
-          <p:nvPr>
-            <p:ph type="title"/>
-          </p:nvPr>
-        </p:nvSpPr>
-        <p:spPr>
-          <a:xfrm>
-            <a:off x="444500" y="542925"/>
             <a:ext cx="11214100" cy="424732"/>
           </a:xfrm>
         </p:spPr>
@@ -25905,7 +25759,7 @@
             <a:fld id="{C263D6C4-4840-40CC-AC84-17E24B3B7BDE}" type="slidenum">
               <a:rPr lang="en-US" noProof="0" smtClean="0"/>
               <a:pPr/>
-              <a:t>11</a:t>
+              <a:t>10</a:t>
             </a:fld>
             <a:endParaRPr lang="en-US" noProof="0" dirty="0"/>
           </a:p>
@@ -25983,7 +25837,7 @@
 </p:sld>
 </file>
 
-<file path=ppt/slides/slide12.xml><?xml version="1.0" encoding="utf-8"?>
+<file path=ppt/slides/slide11.xml><?xml version="1.0" encoding="utf-8"?>
 <p:sld xmlns:a="http://schemas.openxmlformats.org/drawingml/2006/main" xmlns:r="http://schemas.openxmlformats.org/officeDocument/2006/relationships" xmlns:p="http://schemas.openxmlformats.org/presentationml/2006/main">
   <p:cSld>
     <p:spTree>
@@ -26043,7 +25897,7 @@
             <a:fld id="{C263D6C4-4840-40CC-AC84-17E24B3B7BDE}" type="slidenum">
               <a:rPr lang="en-US" noProof="0" smtClean="0"/>
               <a:pPr/>
-              <a:t>12</a:t>
+              <a:t>11</a:t>
             </a:fld>
             <a:endParaRPr lang="en-US" noProof="0" dirty="0"/>
           </a:p>
@@ -26322,7 +26176,7 @@
 </p:sld>
 </file>
 
-<file path=ppt/slides/slide13.xml><?xml version="1.0" encoding="utf-8"?>
+<file path=ppt/slides/slide12.xml><?xml version="1.0" encoding="utf-8"?>
 <p:sld xmlns:a="http://schemas.openxmlformats.org/drawingml/2006/main" xmlns:r="http://schemas.openxmlformats.org/officeDocument/2006/relationships" xmlns:p="http://schemas.openxmlformats.org/presentationml/2006/main">
   <p:cSld>
     <p:spTree>
@@ -26379,7 +26233,7 @@
             <a:fld id="{C263D6C4-4840-40CC-AC84-17E24B3B7BDE}" type="slidenum">
               <a:rPr lang="en-US" noProof="0" smtClean="0"/>
               <a:pPr/>
-              <a:t>13</a:t>
+              <a:t>12</a:t>
             </a:fld>
             <a:endParaRPr lang="en-US" noProof="0" dirty="0"/>
           </a:p>
@@ -26500,7 +26354,7 @@
 </p:sld>
 </file>
 
-<file path=ppt/slides/slide14.xml><?xml version="1.0" encoding="utf-8"?>
+<file path=ppt/slides/slide13.xml><?xml version="1.0" encoding="utf-8"?>
 <p:sld xmlns:a="http://schemas.openxmlformats.org/drawingml/2006/main" xmlns:r="http://schemas.openxmlformats.org/officeDocument/2006/relationships" xmlns:p="http://schemas.openxmlformats.org/presentationml/2006/main">
   <p:cSld>
     <p:spTree>
@@ -26560,7 +26414,7 @@
             <a:fld id="{C263D6C4-4840-40CC-AC84-17E24B3B7BDE}" type="slidenum">
               <a:rPr lang="en-US" noProof="0" smtClean="0"/>
               <a:pPr/>
-              <a:t>14</a:t>
+              <a:t>13</a:t>
             </a:fld>
             <a:endParaRPr lang="en-US" noProof="0" dirty="0"/>
           </a:p>
@@ -27365,7 +27219,7 @@
 </p:sld>
 </file>
 
-<file path=ppt/slides/slide15.xml><?xml version="1.0" encoding="utf-8"?>
+<file path=ppt/slides/slide14.xml><?xml version="1.0" encoding="utf-8"?>
 <p:sld xmlns:a="http://schemas.openxmlformats.org/drawingml/2006/main" xmlns:r="http://schemas.openxmlformats.org/officeDocument/2006/relationships" xmlns:p="http://schemas.openxmlformats.org/presentationml/2006/main">
   <p:cSld>
     <p:spTree>
@@ -27400,7 +27254,7 @@
             <a:fld id="{C263D6C4-4840-40CC-AC84-17E24B3B7BDE}" type="slidenum">
               <a:rPr lang="en-US" noProof="0" smtClean="0"/>
               <a:pPr/>
-              <a:t>15</a:t>
+              <a:t>14</a:t>
             </a:fld>
             <a:endParaRPr lang="en-US" noProof="0" dirty="0"/>
           </a:p>
@@ -29937,7 +29791,7 @@
 </p:sld>
 </file>
 
-<file path=ppt/slides/slide16.xml><?xml version="1.0" encoding="utf-8"?>
+<file path=ppt/slides/slide15.xml><?xml version="1.0" encoding="utf-8"?>
 <p:sld xmlns:a="http://schemas.openxmlformats.org/drawingml/2006/main" xmlns:r="http://schemas.openxmlformats.org/officeDocument/2006/relationships" xmlns:p="http://schemas.openxmlformats.org/presentationml/2006/main">
   <p:cSld>
     <p:spTree>
@@ -29972,7 +29826,7 @@
             <a:fld id="{C263D6C4-4840-40CC-AC84-17E24B3B7BDE}" type="slidenum">
               <a:rPr lang="en-US" noProof="0" smtClean="0"/>
               <a:pPr/>
-              <a:t>16</a:t>
+              <a:t>15</a:t>
             </a:fld>
             <a:endParaRPr lang="en-US" noProof="0" dirty="0"/>
           </a:p>
@@ -30449,7 +30303,7 @@
 </p:sld>
 </file>
 
-<file path=ppt/slides/slide17.xml><?xml version="1.0" encoding="utf-8"?>
+<file path=ppt/slides/slide16.xml><?xml version="1.0" encoding="utf-8"?>
 <p:sld xmlns:a="http://schemas.openxmlformats.org/drawingml/2006/main" xmlns:r="http://schemas.openxmlformats.org/officeDocument/2006/relationships" xmlns:p="http://schemas.openxmlformats.org/presentationml/2006/main">
   <p:cSld>
     <p:spTree>
@@ -30484,7 +30338,7 @@
             <a:fld id="{C263D6C4-4840-40CC-AC84-17E24B3B7BDE}" type="slidenum">
               <a:rPr lang="en-US" noProof="0" smtClean="0"/>
               <a:pPr/>
-              <a:t>17</a:t>
+              <a:t>16</a:t>
             </a:fld>
             <a:endParaRPr lang="en-US" noProof="0" dirty="0"/>
           </a:p>
@@ -30538,7 +30392,7 @@
 </p:sld>
 </file>
 
-<file path=ppt/slides/slide18.xml><?xml version="1.0" encoding="utf-8"?>
+<file path=ppt/slides/slide17.xml><?xml version="1.0" encoding="utf-8"?>
 <p:sld xmlns:a="http://schemas.openxmlformats.org/drawingml/2006/main" xmlns:r="http://schemas.openxmlformats.org/officeDocument/2006/relationships" xmlns:p="http://schemas.openxmlformats.org/presentationml/2006/main">
   <p:cSld>
     <p:spTree>
@@ -30598,7 +30452,7 @@
             <a:fld id="{C263D6C4-4840-40CC-AC84-17E24B3B7BDE}" type="slidenum">
               <a:rPr lang="en-US" noProof="0" smtClean="0"/>
               <a:pPr/>
-              <a:t>18</a:t>
+              <a:t>17</a:t>
             </a:fld>
             <a:endParaRPr lang="en-US" noProof="0" dirty="0"/>
           </a:p>
@@ -30723,7 +30577,7 @@
 </p:sld>
 </file>
 
-<file path=ppt/slides/slide19.xml><?xml version="1.0" encoding="utf-8"?>
+<file path=ppt/slides/slide18.xml><?xml version="1.0" encoding="utf-8"?>
 <p:sld xmlns:a="http://schemas.openxmlformats.org/drawingml/2006/main" xmlns:r="http://schemas.openxmlformats.org/officeDocument/2006/relationships" xmlns:p="http://schemas.openxmlformats.org/presentationml/2006/main">
   <p:cSld>
     <p:spTree>
@@ -30758,7 +30612,7 @@
             <a:fld id="{C263D6C4-4840-40CC-AC84-17E24B3B7BDE}" type="slidenum">
               <a:rPr lang="en-US" noProof="0" smtClean="0"/>
               <a:pPr/>
-              <a:t>19</a:t>
+              <a:t>18</a:t>
             </a:fld>
             <a:endParaRPr lang="en-US" noProof="0" dirty="0"/>
           </a:p>
@@ -31745,117 +31599,7 @@
 </p:sld>
 </file>
 
-<file path=ppt/slides/slide2.xml><?xml version="1.0" encoding="utf-8"?>
-<p:sld xmlns:a="http://schemas.openxmlformats.org/drawingml/2006/main" xmlns:r="http://schemas.openxmlformats.org/officeDocument/2006/relationships" xmlns:p="http://schemas.openxmlformats.org/presentationml/2006/main">
-  <p:cSld>
-    <p:spTree>
-      <p:nvGrpSpPr>
-        <p:cNvPr id="1" name=""/>
-        <p:cNvGrpSpPr/>
-        <p:nvPr/>
-      </p:nvGrpSpPr>
-      <p:grpSpPr>
-        <a:xfrm>
-          <a:off x="0" y="0"/>
-          <a:ext cx="0" cy="0"/>
-          <a:chOff x="0" y="0"/>
-          <a:chExt cx="0" cy="0"/>
-        </a:xfrm>
-      </p:grpSpPr>
-      <p:sp>
-        <p:nvSpPr>
-          <p:cNvPr id="2" name="Text Placeholder 1">
-            <a:extLst>
-              <a:ext uri="{FF2B5EF4-FFF2-40B4-BE49-F238E27FC236}">
-                <a16:creationId xmlns:a16="http://schemas.microsoft.com/office/drawing/2014/main" id="{45A43791-3E8B-26D8-CE82-C5C8913727EA}"/>
-              </a:ext>
-            </a:extLst>
-          </p:cNvPr>
-          <p:cNvSpPr>
-            <a:spLocks noGrp="1"/>
-          </p:cNvSpPr>
-          <p:nvPr>
-            <p:ph type="body" idx="1"/>
-          </p:nvPr>
-        </p:nvSpPr>
-        <p:spPr/>
-        <p:txBody>
-          <a:bodyPr/>
-          <a:lstStyle/>
-          <a:p>
-            <a:endParaRPr lang="en-US"/>
-          </a:p>
-        </p:txBody>
-      </p:sp>
-      <p:sp>
-        <p:nvSpPr>
-          <p:cNvPr id="3" name="Slide Number Placeholder 2">
-            <a:extLst>
-              <a:ext uri="{FF2B5EF4-FFF2-40B4-BE49-F238E27FC236}">
-                <a16:creationId xmlns:a16="http://schemas.microsoft.com/office/drawing/2014/main" id="{5652BCC4-BC73-C8A7-A6A1-99E88EC8D729}"/>
-              </a:ext>
-            </a:extLst>
-          </p:cNvPr>
-          <p:cNvSpPr>
-            <a:spLocks noGrp="1"/>
-          </p:cNvSpPr>
-          <p:nvPr>
-            <p:ph type="sldNum" sz="quarter" idx="12"/>
-          </p:nvPr>
-        </p:nvSpPr>
-        <p:spPr/>
-        <p:txBody>
-          <a:bodyPr/>
-          <a:lstStyle/>
-          <a:p>
-            <a:fld id="{C263D6C4-4840-40CC-AC84-17E24B3B7BDE}" type="slidenum">
-              <a:rPr lang="en-US" noProof="0" smtClean="0"/>
-              <a:pPr/>
-              <a:t>2</a:t>
-            </a:fld>
-            <a:endParaRPr lang="en-US" noProof="0" dirty="0"/>
-          </a:p>
-        </p:txBody>
-      </p:sp>
-      <p:sp>
-        <p:nvSpPr>
-          <p:cNvPr id="4" name="Title 3">
-            <a:extLst>
-              <a:ext uri="{FF2B5EF4-FFF2-40B4-BE49-F238E27FC236}">
-                <a16:creationId xmlns:a16="http://schemas.microsoft.com/office/drawing/2014/main" id="{1A64FF48-ACA7-B0C3-B60C-3D2340FDA0AB}"/>
-              </a:ext>
-            </a:extLst>
-          </p:cNvPr>
-          <p:cNvSpPr>
-            <a:spLocks noGrp="1"/>
-          </p:cNvSpPr>
-          <p:nvPr>
-            <p:ph type="title"/>
-          </p:nvPr>
-        </p:nvSpPr>
-        <p:spPr/>
-        <p:txBody>
-          <a:bodyPr/>
-          <a:lstStyle/>
-          <a:p>
-            <a:endParaRPr lang="en-US"/>
-          </a:p>
-        </p:txBody>
-      </p:sp>
-    </p:spTree>
-    <p:extLst>
-      <p:ext uri="{BB962C8B-B14F-4D97-AF65-F5344CB8AC3E}">
-        <p14:creationId xmlns:p14="http://schemas.microsoft.com/office/powerpoint/2010/main" val="3234971420"/>
-      </p:ext>
-    </p:extLst>
-  </p:cSld>
-  <p:clrMapOvr>
-    <a:masterClrMapping/>
-  </p:clrMapOvr>
-</p:sld>
-</file>
-
-<file path=ppt/slides/slide20.xml><?xml version="1.0" encoding="utf-8"?>
+<file path=ppt/slides/slide19.xml><?xml version="1.0" encoding="utf-8"?>
 <p:sld xmlns:a="http://schemas.openxmlformats.org/drawingml/2006/main" xmlns:r="http://schemas.openxmlformats.org/officeDocument/2006/relationships" xmlns:p="http://schemas.openxmlformats.org/presentationml/2006/main">
   <p:cSld>
     <p:spTree>
@@ -31890,7 +31634,7 @@
             <a:fld id="{C263D6C4-4840-40CC-AC84-17E24B3B7BDE}" type="slidenum">
               <a:rPr lang="en-US" noProof="0" smtClean="0"/>
               <a:pPr/>
-              <a:t>20</a:t>
+              <a:t>19</a:t>
             </a:fld>
             <a:endParaRPr lang="en-US" noProof="0" dirty="0"/>
           </a:p>
@@ -34202,7 +33946,209 @@
 </p:sld>
 </file>
 
-<file path=ppt/slides/slide21.xml><?xml version="1.0" encoding="utf-8"?>
+<file path=ppt/slides/slide2.xml><?xml version="1.0" encoding="utf-8"?>
+<p:sld xmlns:a="http://schemas.openxmlformats.org/drawingml/2006/main" xmlns:r="http://schemas.openxmlformats.org/officeDocument/2006/relationships" xmlns:p="http://schemas.openxmlformats.org/presentationml/2006/main">
+  <p:cSld>
+    <p:spTree>
+      <p:nvGrpSpPr>
+        <p:cNvPr id="1" name=""/>
+        <p:cNvGrpSpPr/>
+        <p:nvPr/>
+      </p:nvGrpSpPr>
+      <p:grpSpPr>
+        <a:xfrm>
+          <a:off x="0" y="0"/>
+          <a:ext cx="0" cy="0"/>
+          <a:chOff x="0" y="0"/>
+          <a:chExt cx="0" cy="0"/>
+        </a:xfrm>
+      </p:grpSpPr>
+      <p:sp>
+        <p:nvSpPr>
+          <p:cNvPr id="4" name="Title 3">
+            <a:extLst>
+              <a:ext uri="{FF2B5EF4-FFF2-40B4-BE49-F238E27FC236}">
+                <a16:creationId xmlns:a16="http://schemas.microsoft.com/office/drawing/2014/main" id="{E3BD8413-C238-49D7-A4E1-E8FEF1811A0E}"/>
+              </a:ext>
+            </a:extLst>
+          </p:cNvPr>
+          <p:cNvSpPr>
+            <a:spLocks noGrp="1"/>
+          </p:cNvSpPr>
+          <p:nvPr>
+            <p:ph type="title"/>
+          </p:nvPr>
+        </p:nvSpPr>
+        <p:spPr>
+          <a:xfrm>
+            <a:off x="594711" y="1134208"/>
+            <a:ext cx="7781544" cy="859055"/>
+          </a:xfrm>
+        </p:spPr>
+        <p:txBody>
+          <a:bodyPr/>
+          <a:lstStyle/>
+          <a:p>
+            <a:r>
+              <a:rPr lang="en-US" dirty="0"/>
+              <a:t>Contents</a:t>
+            </a:r>
+          </a:p>
+        </p:txBody>
+      </p:sp>
+      <p:sp>
+        <p:nvSpPr>
+          <p:cNvPr id="2" name="Slide Number Placeholder 1">
+            <a:extLst>
+              <a:ext uri="{FF2B5EF4-FFF2-40B4-BE49-F238E27FC236}">
+                <a16:creationId xmlns:a16="http://schemas.microsoft.com/office/drawing/2014/main" id="{0B24BF10-2B55-43AB-9F77-F1A1410384A9}"/>
+              </a:ext>
+            </a:extLst>
+          </p:cNvPr>
+          <p:cNvSpPr>
+            <a:spLocks noGrp="1"/>
+          </p:cNvSpPr>
+          <p:nvPr>
+            <p:ph type="sldNum" sz="quarter" idx="12"/>
+          </p:nvPr>
+        </p:nvSpPr>
+        <p:spPr/>
+        <p:txBody>
+          <a:bodyPr/>
+          <a:lstStyle/>
+          <a:p>
+            <a:fld id="{C263D6C4-4840-40CC-AC84-17E24B3B7BDE}" type="slidenum">
+              <a:rPr lang="en-US" smtClean="0"/>
+              <a:pPr/>
+              <a:t>2</a:t>
+            </a:fld>
+            <a:endParaRPr lang="en-US" dirty="0"/>
+          </a:p>
+        </p:txBody>
+      </p:sp>
+      <p:sp>
+        <p:nvSpPr>
+          <p:cNvPr id="6" name="TextBox 5"/>
+          <p:cNvSpPr txBox="1"/>
+          <p:nvPr/>
+        </p:nvSpPr>
+        <p:spPr>
+          <a:xfrm>
+            <a:off x="1688123" y="2699238"/>
+            <a:ext cx="5846885" cy="2554545"/>
+          </a:xfrm>
+          <a:prstGeom prst="rect">
+            <a:avLst/>
+          </a:prstGeom>
+          <a:noFill/>
+        </p:spPr>
+        <p:txBody>
+          <a:bodyPr wrap="square" rtlCol="0">
+            <a:spAutoFit/>
+          </a:bodyPr>
+          <a:lstStyle/>
+          <a:p>
+            <a:pPr marL="285750" indent="-285750">
+              <a:buFont typeface="Courier New" panose="02070309020205020404" pitchFamily="49" charset="0"/>
+              <a:buChar char="o"/>
+            </a:pPr>
+            <a:r>
+              <a:rPr lang="en-US" sz="3200" dirty="0">
+                <a:solidFill>
+                  <a:schemeClr val="bg1"/>
+                </a:solidFill>
+                <a:latin typeface="Times New Roman" panose="02020603050405020304" pitchFamily="18" charset="0"/>
+                <a:cs typeface="Times New Roman" panose="02020603050405020304" pitchFamily="18" charset="0"/>
+              </a:rPr>
+              <a:t>Introduction</a:t>
+            </a:r>
+          </a:p>
+          <a:p>
+            <a:pPr marL="285750" indent="-285750">
+              <a:buFont typeface="Courier New" panose="02070309020205020404" pitchFamily="49" charset="0"/>
+              <a:buChar char="o"/>
+            </a:pPr>
+            <a:endParaRPr lang="en-US" sz="3200" dirty="0">
+              <a:solidFill>
+                <a:schemeClr val="bg1"/>
+              </a:solidFill>
+              <a:latin typeface="Times New Roman" panose="02020603050405020304" pitchFamily="18" charset="0"/>
+              <a:cs typeface="Times New Roman" panose="02020603050405020304" pitchFamily="18" charset="0"/>
+            </a:endParaRPr>
+          </a:p>
+          <a:p>
+            <a:pPr marL="285750" indent="-285750">
+              <a:buFont typeface="Courier New" panose="02070309020205020404" pitchFamily="49" charset="0"/>
+              <a:buChar char="o"/>
+            </a:pPr>
+            <a:r>
+              <a:rPr lang="en-US" sz="3200" dirty="0">
+                <a:solidFill>
+                  <a:schemeClr val="bg1"/>
+                </a:solidFill>
+                <a:latin typeface="Times New Roman" panose="02020603050405020304" pitchFamily="18" charset="0"/>
+                <a:cs typeface="Times New Roman" panose="02020603050405020304" pitchFamily="18" charset="0"/>
+              </a:rPr>
+              <a:t>ANOVA</a:t>
+            </a:r>
+          </a:p>
+          <a:p>
+            <a:pPr marL="285750" indent="-285750">
+              <a:buFont typeface="Courier New" panose="02070309020205020404" pitchFamily="49" charset="0"/>
+              <a:buChar char="o"/>
+            </a:pPr>
+            <a:endParaRPr lang="en-US" sz="3200" dirty="0">
+              <a:solidFill>
+                <a:schemeClr val="bg1"/>
+              </a:solidFill>
+              <a:latin typeface="Times New Roman" panose="02020603050405020304" pitchFamily="18" charset="0"/>
+              <a:cs typeface="Times New Roman" panose="02020603050405020304" pitchFamily="18" charset="0"/>
+            </a:endParaRPr>
+          </a:p>
+          <a:p>
+            <a:pPr marL="285750" indent="-285750">
+              <a:buFont typeface="Courier New" panose="02070309020205020404" pitchFamily="49" charset="0"/>
+              <a:buChar char="o"/>
+            </a:pPr>
+            <a:r>
+              <a:rPr lang="en-US" sz="3200" dirty="0">
+                <a:solidFill>
+                  <a:schemeClr val="bg1"/>
+                </a:solidFill>
+                <a:latin typeface="Times New Roman" panose="02020603050405020304" pitchFamily="18" charset="0"/>
+                <a:cs typeface="Times New Roman" panose="02020603050405020304" pitchFamily="18" charset="0"/>
+              </a:rPr>
+              <a:t>T-test</a:t>
+            </a:r>
+          </a:p>
+        </p:txBody>
+      </p:sp>
+    </p:spTree>
+    <p:extLst>
+      <p:ext uri="{BB962C8B-B14F-4D97-AF65-F5344CB8AC3E}">
+        <p14:creationId xmlns:p14="http://schemas.microsoft.com/office/powerpoint/2010/main" val="2902794312"/>
+      </p:ext>
+    </p:extLst>
+  </p:cSld>
+  <p:clrMapOvr>
+    <a:masterClrMapping/>
+  </p:clrMapOvr>
+  <mc:AlternateContent xmlns:mc="http://schemas.openxmlformats.org/markup-compatibility/2006" xmlns:p14="http://schemas.microsoft.com/office/powerpoint/2010/main">
+    <mc:Choice Requires="p14">
+      <p:transition spd="med" p14:dur="700">
+        <p:fade/>
+      </p:transition>
+    </mc:Choice>
+    <mc:Fallback xmlns="">
+      <p:transition spd="med">
+        <p:fade/>
+      </p:transition>
+    </mc:Fallback>
+  </mc:AlternateContent>
+</p:sld>
+</file>
+
+<file path=ppt/slides/slide20.xml><?xml version="1.0" encoding="utf-8"?>
 <p:sld xmlns:a="http://schemas.openxmlformats.org/drawingml/2006/main" xmlns:r="http://schemas.openxmlformats.org/officeDocument/2006/relationships" xmlns:p="http://schemas.openxmlformats.org/presentationml/2006/main">
   <p:cSld>
     <p:spTree>
@@ -34237,7 +34183,7 @@
             <a:fld id="{C263D6C4-4840-40CC-AC84-17E24B3B7BDE}" type="slidenum">
               <a:rPr lang="en-US" noProof="0" smtClean="0"/>
               <a:pPr/>
-              <a:t>21</a:t>
+              <a:t>20</a:t>
             </a:fld>
             <a:endParaRPr lang="en-US" noProof="0" dirty="0"/>
           </a:p>
@@ -34755,7 +34701,7 @@
 </p:sld>
 </file>
 
-<file path=ppt/slides/slide22.xml><?xml version="1.0" encoding="utf-8"?>
+<file path=ppt/slides/slide21.xml><?xml version="1.0" encoding="utf-8"?>
 <p:sld xmlns:a="http://schemas.openxmlformats.org/drawingml/2006/main" xmlns:r="http://schemas.openxmlformats.org/officeDocument/2006/relationships" xmlns:p="http://schemas.openxmlformats.org/presentationml/2006/main">
   <p:cSld>
     <p:spTree>
@@ -34815,7 +34761,7 @@
             <a:fld id="{C263D6C4-4840-40CC-AC84-17E24B3B7BDE}" type="slidenum">
               <a:rPr lang="en-US" noProof="0" smtClean="0"/>
               <a:pPr/>
-              <a:t>22</a:t>
+              <a:t>21</a:t>
             </a:fld>
             <a:endParaRPr lang="en-US" noProof="0" dirty="0"/>
           </a:p>
@@ -34907,7 +34853,7 @@
 </p:sld>
 </file>
 
-<file path=ppt/slides/slide23.xml><?xml version="1.0" encoding="utf-8"?>
+<file path=ppt/slides/slide22.xml><?xml version="1.0" encoding="utf-8"?>
 <p:sld xmlns:a="http://schemas.openxmlformats.org/drawingml/2006/main" xmlns:r="http://schemas.openxmlformats.org/officeDocument/2006/relationships" xmlns:p="http://schemas.openxmlformats.org/presentationml/2006/main">
   <p:cSld>
     <p:spTree>
@@ -34967,7 +34913,7 @@
             <a:fld id="{C263D6C4-4840-40CC-AC84-17E24B3B7BDE}" type="slidenum">
               <a:rPr lang="en-US" noProof="0" smtClean="0"/>
               <a:pPr/>
-              <a:t>23</a:t>
+              <a:t>22</a:t>
             </a:fld>
             <a:endParaRPr lang="en-US" noProof="0" dirty="0"/>
           </a:p>
@@ -35365,7 +35311,7 @@
 </p:sld>
 </file>
 
-<file path=ppt/slides/slide24.xml><?xml version="1.0" encoding="utf-8"?>
+<file path=ppt/slides/slide23.xml><?xml version="1.0" encoding="utf-8"?>
 <p:sld xmlns:a="http://schemas.openxmlformats.org/drawingml/2006/main" xmlns:r="http://schemas.openxmlformats.org/officeDocument/2006/relationships" xmlns:p="http://schemas.openxmlformats.org/presentationml/2006/main">
   <p:cSld>
     <p:spTree>
@@ -35430,7 +35376,7 @@
             <a:fld id="{C263D6C4-4840-40CC-AC84-17E24B3B7BDE}" type="slidenum">
               <a:rPr lang="en-US" noProof="0" smtClean="0"/>
               <a:pPr/>
-              <a:t>24</a:t>
+              <a:t>23</a:t>
             </a:fld>
             <a:endParaRPr lang="en-US" noProof="0" dirty="0"/>
           </a:p>
@@ -36746,7 +36692,7 @@
 </p:sld>
 </file>
 
-<file path=ppt/slides/slide25.xml><?xml version="1.0" encoding="utf-8"?>
+<file path=ppt/slides/slide24.xml><?xml version="1.0" encoding="utf-8"?>
 <p:sld xmlns:a="http://schemas.openxmlformats.org/drawingml/2006/main" xmlns:r="http://schemas.openxmlformats.org/officeDocument/2006/relationships" xmlns:p="http://schemas.openxmlformats.org/presentationml/2006/main">
   <p:cSld>
     <p:spTree>
@@ -36806,7 +36752,7 @@
             <a:fld id="{C263D6C4-4840-40CC-AC84-17E24B3B7BDE}" type="slidenum">
               <a:rPr lang="en-US" noProof="0" smtClean="0"/>
               <a:pPr/>
-              <a:t>25</a:t>
+              <a:t>24</a:t>
             </a:fld>
             <a:endParaRPr lang="en-US" noProof="0" dirty="0"/>
           </a:p>
@@ -37174,7 +37120,7 @@
 </p:sld>
 </file>
 
-<file path=ppt/slides/slide26.xml><?xml version="1.0" encoding="utf-8"?>
+<file path=ppt/slides/slide25.xml><?xml version="1.0" encoding="utf-8"?>
 <p:sld xmlns:a="http://schemas.openxmlformats.org/drawingml/2006/main" xmlns:r="http://schemas.openxmlformats.org/officeDocument/2006/relationships" xmlns:p="http://schemas.openxmlformats.org/presentationml/2006/main">
   <p:cSld>
     <p:spTree>
@@ -37234,7 +37180,7 @@
             <a:fld id="{C263D6C4-4840-40CC-AC84-17E24B3B7BDE}" type="slidenum">
               <a:rPr lang="en-US" noProof="0" smtClean="0"/>
               <a:pPr/>
-              <a:t>26</a:t>
+              <a:t>25</a:t>
             </a:fld>
             <a:endParaRPr lang="en-US" noProof="0" dirty="0"/>
           </a:p>
@@ -37493,7 +37439,7 @@
 </p:sld>
 </file>
 
-<file path=ppt/slides/slide27.xml><?xml version="1.0" encoding="utf-8"?>
+<file path=ppt/slides/slide26.xml><?xml version="1.0" encoding="utf-8"?>
 <p:sld xmlns:a="http://schemas.openxmlformats.org/drawingml/2006/main" xmlns:r="http://schemas.openxmlformats.org/officeDocument/2006/relationships" xmlns:p="http://schemas.openxmlformats.org/presentationml/2006/main">
   <p:cSld>
     <p:spTree>
@@ -37553,7 +37499,7 @@
             <a:fld id="{C263D6C4-4840-40CC-AC84-17E24B3B7BDE}" type="slidenum">
               <a:rPr lang="en-US" noProof="0" smtClean="0"/>
               <a:pPr/>
-              <a:t>27</a:t>
+              <a:t>26</a:t>
             </a:fld>
             <a:endParaRPr lang="en-US" noProof="0" dirty="0"/>
           </a:p>
@@ -37754,7 +37700,7 @@
 </p:sld>
 </file>
 
-<file path=ppt/slides/slide28.xml><?xml version="1.0" encoding="utf-8"?>
+<file path=ppt/slides/slide27.xml><?xml version="1.0" encoding="utf-8"?>
 <p:sld xmlns:a="http://schemas.openxmlformats.org/drawingml/2006/main" xmlns:r="http://schemas.openxmlformats.org/officeDocument/2006/relationships" xmlns:p="http://schemas.openxmlformats.org/presentationml/2006/main">
   <p:cSld>
     <p:spTree>
@@ -37814,7 +37760,7 @@
             <a:fld id="{C263D6C4-4840-40CC-AC84-17E24B3B7BDE}" type="slidenum">
               <a:rPr lang="en-US" noProof="0" smtClean="0"/>
               <a:pPr/>
-              <a:t>28</a:t>
+              <a:t>27</a:t>
             </a:fld>
             <a:endParaRPr lang="en-US" noProof="0" dirty="0"/>
           </a:p>
@@ -37935,7 +37881,7 @@
 </p:sld>
 </file>
 
-<file path=ppt/slides/slide29.xml><?xml version="1.0" encoding="utf-8"?>
+<file path=ppt/slides/slide28.xml><?xml version="1.0" encoding="utf-8"?>
 <p:sld xmlns:a="http://schemas.openxmlformats.org/drawingml/2006/main" xmlns:r="http://schemas.openxmlformats.org/officeDocument/2006/relationships" xmlns:p="http://schemas.openxmlformats.org/presentationml/2006/main">
   <p:cSld>
     <p:spTree>
@@ -37995,7 +37941,7 @@
             <a:fld id="{C263D6C4-4840-40CC-AC84-17E24B3B7BDE}" type="slidenum">
               <a:rPr lang="en-US" noProof="0" smtClean="0"/>
               <a:pPr/>
-              <a:t>29</a:t>
+              <a:t>28</a:t>
             </a:fld>
             <a:endParaRPr lang="en-US" noProof="0" dirty="0"/>
           </a:p>
@@ -38546,209 +38492,7 @@
 </p:sld>
 </file>
 
-<file path=ppt/slides/slide3.xml><?xml version="1.0" encoding="utf-8"?>
-<p:sld xmlns:a="http://schemas.openxmlformats.org/drawingml/2006/main" xmlns:r="http://schemas.openxmlformats.org/officeDocument/2006/relationships" xmlns:p="http://schemas.openxmlformats.org/presentationml/2006/main">
-  <p:cSld>
-    <p:spTree>
-      <p:nvGrpSpPr>
-        <p:cNvPr id="1" name=""/>
-        <p:cNvGrpSpPr/>
-        <p:nvPr/>
-      </p:nvGrpSpPr>
-      <p:grpSpPr>
-        <a:xfrm>
-          <a:off x="0" y="0"/>
-          <a:ext cx="0" cy="0"/>
-          <a:chOff x="0" y="0"/>
-          <a:chExt cx="0" cy="0"/>
-        </a:xfrm>
-      </p:grpSpPr>
-      <p:sp>
-        <p:nvSpPr>
-          <p:cNvPr id="4" name="Title 3">
-            <a:extLst>
-              <a:ext uri="{FF2B5EF4-FFF2-40B4-BE49-F238E27FC236}">
-                <a16:creationId xmlns:a16="http://schemas.microsoft.com/office/drawing/2014/main" id="{E3BD8413-C238-49D7-A4E1-E8FEF1811A0E}"/>
-              </a:ext>
-            </a:extLst>
-          </p:cNvPr>
-          <p:cNvSpPr>
-            <a:spLocks noGrp="1"/>
-          </p:cNvSpPr>
-          <p:nvPr>
-            <p:ph type="title"/>
-          </p:nvPr>
-        </p:nvSpPr>
-        <p:spPr>
-          <a:xfrm>
-            <a:off x="594711" y="1134208"/>
-            <a:ext cx="7781544" cy="859055"/>
-          </a:xfrm>
-        </p:spPr>
-        <p:txBody>
-          <a:bodyPr/>
-          <a:lstStyle/>
-          <a:p>
-            <a:r>
-              <a:rPr lang="en-US" dirty="0"/>
-              <a:t>Contents</a:t>
-            </a:r>
-          </a:p>
-        </p:txBody>
-      </p:sp>
-      <p:sp>
-        <p:nvSpPr>
-          <p:cNvPr id="2" name="Slide Number Placeholder 1">
-            <a:extLst>
-              <a:ext uri="{FF2B5EF4-FFF2-40B4-BE49-F238E27FC236}">
-                <a16:creationId xmlns:a16="http://schemas.microsoft.com/office/drawing/2014/main" id="{0B24BF10-2B55-43AB-9F77-F1A1410384A9}"/>
-              </a:ext>
-            </a:extLst>
-          </p:cNvPr>
-          <p:cNvSpPr>
-            <a:spLocks noGrp="1"/>
-          </p:cNvSpPr>
-          <p:nvPr>
-            <p:ph type="sldNum" sz="quarter" idx="12"/>
-          </p:nvPr>
-        </p:nvSpPr>
-        <p:spPr/>
-        <p:txBody>
-          <a:bodyPr/>
-          <a:lstStyle/>
-          <a:p>
-            <a:fld id="{C263D6C4-4840-40CC-AC84-17E24B3B7BDE}" type="slidenum">
-              <a:rPr lang="en-US" smtClean="0"/>
-              <a:pPr/>
-              <a:t>3</a:t>
-            </a:fld>
-            <a:endParaRPr lang="en-US" dirty="0"/>
-          </a:p>
-        </p:txBody>
-      </p:sp>
-      <p:sp>
-        <p:nvSpPr>
-          <p:cNvPr id="6" name="TextBox 5"/>
-          <p:cNvSpPr txBox="1"/>
-          <p:nvPr/>
-        </p:nvSpPr>
-        <p:spPr>
-          <a:xfrm>
-            <a:off x="1688123" y="2699238"/>
-            <a:ext cx="5846885" cy="2554545"/>
-          </a:xfrm>
-          <a:prstGeom prst="rect">
-            <a:avLst/>
-          </a:prstGeom>
-          <a:noFill/>
-        </p:spPr>
-        <p:txBody>
-          <a:bodyPr wrap="square" rtlCol="0">
-            <a:spAutoFit/>
-          </a:bodyPr>
-          <a:lstStyle/>
-          <a:p>
-            <a:pPr marL="285750" indent="-285750">
-              <a:buFont typeface="Courier New" panose="02070309020205020404" pitchFamily="49" charset="0"/>
-              <a:buChar char="o"/>
-            </a:pPr>
-            <a:r>
-              <a:rPr lang="en-US" sz="3200" dirty="0">
-                <a:solidFill>
-                  <a:schemeClr val="bg1"/>
-                </a:solidFill>
-                <a:latin typeface="Times New Roman" panose="02020603050405020304" pitchFamily="18" charset="0"/>
-                <a:cs typeface="Times New Roman" panose="02020603050405020304" pitchFamily="18" charset="0"/>
-              </a:rPr>
-              <a:t>Introduction</a:t>
-            </a:r>
-          </a:p>
-          <a:p>
-            <a:pPr marL="285750" indent="-285750">
-              <a:buFont typeface="Courier New" panose="02070309020205020404" pitchFamily="49" charset="0"/>
-              <a:buChar char="o"/>
-            </a:pPr>
-            <a:endParaRPr lang="en-US" sz="3200" dirty="0">
-              <a:solidFill>
-                <a:schemeClr val="bg1"/>
-              </a:solidFill>
-              <a:latin typeface="Times New Roman" panose="02020603050405020304" pitchFamily="18" charset="0"/>
-              <a:cs typeface="Times New Roman" panose="02020603050405020304" pitchFamily="18" charset="0"/>
-            </a:endParaRPr>
-          </a:p>
-          <a:p>
-            <a:pPr marL="285750" indent="-285750">
-              <a:buFont typeface="Courier New" panose="02070309020205020404" pitchFamily="49" charset="0"/>
-              <a:buChar char="o"/>
-            </a:pPr>
-            <a:r>
-              <a:rPr lang="en-US" sz="3200" dirty="0">
-                <a:solidFill>
-                  <a:schemeClr val="bg1"/>
-                </a:solidFill>
-                <a:latin typeface="Times New Roman" panose="02020603050405020304" pitchFamily="18" charset="0"/>
-                <a:cs typeface="Times New Roman" panose="02020603050405020304" pitchFamily="18" charset="0"/>
-              </a:rPr>
-              <a:t>ANOVA</a:t>
-            </a:r>
-          </a:p>
-          <a:p>
-            <a:pPr marL="285750" indent="-285750">
-              <a:buFont typeface="Courier New" panose="02070309020205020404" pitchFamily="49" charset="0"/>
-              <a:buChar char="o"/>
-            </a:pPr>
-            <a:endParaRPr lang="en-US" sz="3200" dirty="0">
-              <a:solidFill>
-                <a:schemeClr val="bg1"/>
-              </a:solidFill>
-              <a:latin typeface="Times New Roman" panose="02020603050405020304" pitchFamily="18" charset="0"/>
-              <a:cs typeface="Times New Roman" panose="02020603050405020304" pitchFamily="18" charset="0"/>
-            </a:endParaRPr>
-          </a:p>
-          <a:p>
-            <a:pPr marL="285750" indent="-285750">
-              <a:buFont typeface="Courier New" panose="02070309020205020404" pitchFamily="49" charset="0"/>
-              <a:buChar char="o"/>
-            </a:pPr>
-            <a:r>
-              <a:rPr lang="en-US" sz="3200" dirty="0">
-                <a:solidFill>
-                  <a:schemeClr val="bg1"/>
-                </a:solidFill>
-                <a:latin typeface="Times New Roman" panose="02020603050405020304" pitchFamily="18" charset="0"/>
-                <a:cs typeface="Times New Roman" panose="02020603050405020304" pitchFamily="18" charset="0"/>
-              </a:rPr>
-              <a:t>T-test</a:t>
-            </a:r>
-          </a:p>
-        </p:txBody>
-      </p:sp>
-    </p:spTree>
-    <p:extLst>
-      <p:ext uri="{BB962C8B-B14F-4D97-AF65-F5344CB8AC3E}">
-        <p14:creationId xmlns:p14="http://schemas.microsoft.com/office/powerpoint/2010/main" val="2902794312"/>
-      </p:ext>
-    </p:extLst>
-  </p:cSld>
-  <p:clrMapOvr>
-    <a:masterClrMapping/>
-  </p:clrMapOvr>
-  <mc:AlternateContent xmlns:mc="http://schemas.openxmlformats.org/markup-compatibility/2006" xmlns:p14="http://schemas.microsoft.com/office/powerpoint/2010/main">
-    <mc:Choice Requires="p14">
-      <p:transition spd="med" p14:dur="700">
-        <p:fade/>
-      </p:transition>
-    </mc:Choice>
-    <mc:Fallback xmlns="">
-      <p:transition spd="med">
-        <p:fade/>
-      </p:transition>
-    </mc:Fallback>
-  </mc:AlternateContent>
-</p:sld>
-</file>
-
-<file path=ppt/slides/slide30.xml><?xml version="1.0" encoding="utf-8"?>
+<file path=ppt/slides/slide29.xml><?xml version="1.0" encoding="utf-8"?>
 <p:sld xmlns:a="http://schemas.openxmlformats.org/drawingml/2006/main" xmlns:r="http://schemas.openxmlformats.org/officeDocument/2006/relationships" xmlns:p="http://schemas.openxmlformats.org/presentationml/2006/main">
   <p:cSld>
     <p:spTree>
@@ -38813,7 +38557,7 @@
             <a:fld id="{C263D6C4-4840-40CC-AC84-17E24B3B7BDE}" type="slidenum">
               <a:rPr lang="en-US" noProof="0" smtClean="0"/>
               <a:pPr/>
-              <a:t>30</a:t>
+              <a:t>29</a:t>
             </a:fld>
             <a:endParaRPr lang="en-US" noProof="0" dirty="0"/>
           </a:p>
@@ -38874,7 +38618,233 @@
 </p:sld>
 </file>
 
-<file path=ppt/slides/slide31.xml><?xml version="1.0" encoding="utf-8"?>
+<file path=ppt/slides/slide3.xml><?xml version="1.0" encoding="utf-8"?>
+<p:sld xmlns:a="http://schemas.openxmlformats.org/drawingml/2006/main" xmlns:r="http://schemas.openxmlformats.org/officeDocument/2006/relationships" xmlns:p="http://schemas.openxmlformats.org/presentationml/2006/main">
+  <p:cSld>
+    <p:spTree>
+      <p:nvGrpSpPr>
+        <p:cNvPr id="1" name=""/>
+        <p:cNvGrpSpPr/>
+        <p:nvPr/>
+      </p:nvGrpSpPr>
+      <p:grpSpPr>
+        <a:xfrm>
+          <a:off x="0" y="0"/>
+          <a:ext cx="0" cy="0"/>
+          <a:chOff x="0" y="0"/>
+          <a:chExt cx="0" cy="0"/>
+        </a:xfrm>
+      </p:grpSpPr>
+      <p:sp>
+        <p:nvSpPr>
+          <p:cNvPr id="2" name="Title 1"/>
+          <p:cNvSpPr>
+            <a:spLocks noGrp="1"/>
+          </p:cNvSpPr>
+          <p:nvPr>
+            <p:ph type="title"/>
+          </p:nvPr>
+        </p:nvSpPr>
+        <p:spPr/>
+        <p:txBody>
+          <a:bodyPr/>
+          <a:lstStyle/>
+          <a:p>
+            <a:r>
+              <a:rPr lang="en-US" dirty="0">
+                <a:latin typeface="Times New Roman" panose="02020603050405020304" pitchFamily="18" charset="0"/>
+                <a:cs typeface="Times New Roman" panose="02020603050405020304" pitchFamily="18" charset="0"/>
+              </a:rPr>
+              <a:t>Introduction</a:t>
+            </a:r>
+          </a:p>
+        </p:txBody>
+      </p:sp>
+      <p:sp>
+        <p:nvSpPr>
+          <p:cNvPr id="3" name="Slide Number Placeholder 2"/>
+          <p:cNvSpPr>
+            <a:spLocks noGrp="1"/>
+          </p:cNvSpPr>
+          <p:nvPr>
+            <p:ph type="sldNum" sz="quarter" idx="12"/>
+          </p:nvPr>
+        </p:nvSpPr>
+        <p:spPr/>
+        <p:txBody>
+          <a:bodyPr/>
+          <a:lstStyle/>
+          <a:p>
+            <a:fld id="{C263D6C4-4840-40CC-AC84-17E24B3B7BDE}" type="slidenum">
+              <a:rPr lang="en-US" noProof="0" smtClean="0"/>
+              <a:pPr/>
+              <a:t>3</a:t>
+            </a:fld>
+            <a:endParaRPr lang="en-US" noProof="0" dirty="0"/>
+          </a:p>
+        </p:txBody>
+      </p:sp>
+      <p:sp>
+        <p:nvSpPr>
+          <p:cNvPr id="5" name="TextBox 4"/>
+          <p:cNvSpPr txBox="1"/>
+          <p:nvPr/>
+        </p:nvSpPr>
+        <p:spPr>
+          <a:xfrm>
+            <a:off x="1389184" y="1899138"/>
+            <a:ext cx="8959361" cy="3785652"/>
+          </a:xfrm>
+          <a:prstGeom prst="rect">
+            <a:avLst/>
+          </a:prstGeom>
+          <a:noFill/>
+        </p:spPr>
+        <p:txBody>
+          <a:bodyPr wrap="square" rtlCol="0">
+            <a:spAutoFit/>
+          </a:bodyPr>
+          <a:lstStyle/>
+          <a:p>
+            <a:pPr marL="342900" indent="-342900">
+              <a:buFont typeface="Arial" panose="020B0604020202020204" pitchFamily="34" charset="0"/>
+              <a:buChar char="•"/>
+            </a:pPr>
+            <a:r>
+              <a:rPr lang="en-US" sz="2400" b="1" dirty="0">
+                <a:solidFill>
+                  <a:schemeClr val="bg1"/>
+                </a:solidFill>
+                <a:latin typeface="Times New Roman" panose="02020603050405020304" pitchFamily="18" charset="0"/>
+                <a:cs typeface="Times New Roman" panose="02020603050405020304" pitchFamily="18" charset="0"/>
+              </a:rPr>
+              <a:t>Sample: </a:t>
+            </a:r>
+            <a:r>
+              <a:rPr lang="en-US" sz="2400" dirty="0">
+                <a:solidFill>
+                  <a:schemeClr val="bg1"/>
+                </a:solidFill>
+                <a:latin typeface="Times New Roman" panose="02020603050405020304" pitchFamily="18" charset="0"/>
+                <a:cs typeface="Times New Roman" panose="02020603050405020304" pitchFamily="18" charset="0"/>
+              </a:rPr>
+              <a:t>A subset or small portion of data that is used to make inference about the whole data.</a:t>
+            </a:r>
+          </a:p>
+          <a:p>
+            <a:pPr marL="342900" indent="-342900">
+              <a:buFont typeface="Arial" panose="020B0604020202020204" pitchFamily="34" charset="0"/>
+              <a:buChar char="•"/>
+            </a:pPr>
+            <a:endParaRPr lang="en-US" sz="2400" b="1" dirty="0">
+              <a:solidFill>
+                <a:schemeClr val="bg1"/>
+              </a:solidFill>
+              <a:latin typeface="Times New Roman" panose="02020603050405020304" pitchFamily="18" charset="0"/>
+              <a:cs typeface="Times New Roman" panose="02020603050405020304" pitchFamily="18" charset="0"/>
+            </a:endParaRPr>
+          </a:p>
+          <a:p>
+            <a:pPr marL="342900" indent="-342900">
+              <a:buFont typeface="Arial" panose="020B0604020202020204" pitchFamily="34" charset="0"/>
+              <a:buChar char="•"/>
+            </a:pPr>
+            <a:r>
+              <a:rPr lang="en-US" sz="2400" b="1" dirty="0">
+                <a:solidFill>
+                  <a:schemeClr val="bg1"/>
+                </a:solidFill>
+                <a:latin typeface="Times New Roman" panose="02020603050405020304" pitchFamily="18" charset="0"/>
+                <a:cs typeface="Times New Roman" panose="02020603050405020304" pitchFamily="18" charset="0"/>
+              </a:rPr>
+              <a:t>Hypothesis Testing: </a:t>
+            </a:r>
+            <a:r>
+              <a:rPr lang="en-US" sz="2400" dirty="0">
+                <a:solidFill>
+                  <a:schemeClr val="bg1"/>
+                </a:solidFill>
+                <a:latin typeface="Times New Roman" panose="02020603050405020304" pitchFamily="18" charset="0"/>
+                <a:cs typeface="Times New Roman" panose="02020603050405020304" pitchFamily="18" charset="0"/>
+              </a:rPr>
+              <a:t>A statistical hypothesis is usually a statement about a set of parameters of a population distribution.</a:t>
+            </a:r>
+            <a:r>
+              <a:rPr lang="en-US" dirty="0"/>
+              <a:t> </a:t>
+            </a:r>
+            <a:r>
+              <a:rPr lang="en-US" sz="2400" dirty="0">
+                <a:solidFill>
+                  <a:schemeClr val="bg1"/>
+                </a:solidFill>
+                <a:latin typeface="Times New Roman" panose="02020603050405020304" pitchFamily="18" charset="0"/>
+                <a:cs typeface="Times New Roman" panose="02020603050405020304" pitchFamily="18" charset="0"/>
+              </a:rPr>
+              <a:t>The objective of a statistical test is not to explicitly determine whether or not H</a:t>
+            </a:r>
+            <a:r>
+              <a:rPr lang="en-US" sz="1400" dirty="0">
+                <a:solidFill>
+                  <a:schemeClr val="bg1"/>
+                </a:solidFill>
+                <a:latin typeface="Times New Roman" panose="02020603050405020304" pitchFamily="18" charset="0"/>
+                <a:cs typeface="Times New Roman" panose="02020603050405020304" pitchFamily="18" charset="0"/>
+              </a:rPr>
+              <a:t>0 </a:t>
+            </a:r>
+            <a:r>
+              <a:rPr lang="en-US" sz="2400" dirty="0">
+                <a:solidFill>
+                  <a:schemeClr val="bg1"/>
+                </a:solidFill>
+                <a:latin typeface="Times New Roman" panose="02020603050405020304" pitchFamily="18" charset="0"/>
+                <a:cs typeface="Times New Roman" panose="02020603050405020304" pitchFamily="18" charset="0"/>
+              </a:rPr>
+              <a:t>(Null Hypothesis) is true but rather to determine if its validity is consistent with the resultant data.</a:t>
+            </a:r>
+          </a:p>
+          <a:p>
+            <a:pPr marL="342900" indent="-342900">
+              <a:buFont typeface="Arial" panose="020B0604020202020204" pitchFamily="34" charset="0"/>
+              <a:buChar char="•"/>
+            </a:pPr>
+            <a:endParaRPr lang="en-US" sz="2400" b="1" dirty="0">
+              <a:solidFill>
+                <a:schemeClr val="bg1"/>
+              </a:solidFill>
+              <a:latin typeface="Times New Roman" panose="02020603050405020304" pitchFamily="18" charset="0"/>
+              <a:cs typeface="Times New Roman" panose="02020603050405020304" pitchFamily="18" charset="0"/>
+            </a:endParaRPr>
+          </a:p>
+          <a:p>
+            <a:r>
+              <a:rPr lang="en-US" sz="2400" b="1" dirty="0">
+                <a:solidFill>
+                  <a:schemeClr val="bg1"/>
+                </a:solidFill>
+                <a:latin typeface="Times New Roman" panose="02020603050405020304" pitchFamily="18" charset="0"/>
+                <a:cs typeface="Times New Roman" panose="02020603050405020304" pitchFamily="18" charset="0"/>
+              </a:rPr>
+              <a:t>                </a:t>
+            </a:r>
+          </a:p>
+        </p:txBody>
+      </p:sp>
+    </p:spTree>
+    <p:extLst>
+      <p:ext uri="{BB962C8B-B14F-4D97-AF65-F5344CB8AC3E}">
+        <p14:creationId xmlns:p14="http://schemas.microsoft.com/office/powerpoint/2010/main" val="4116124292"/>
+      </p:ext>
+    </p:extLst>
+  </p:cSld>
+  <p:clrMapOvr>
+    <a:masterClrMapping/>
+  </p:clrMapOvr>
+</p:sld>
+</file>
+
+<file path=ppt/slides/slide30.xml><?xml version="1.0" encoding="utf-8"?>
 <p:sld xmlns:a="http://schemas.openxmlformats.org/drawingml/2006/main" xmlns:r="http://schemas.openxmlformats.org/officeDocument/2006/relationships" xmlns:p="http://schemas.openxmlformats.org/presentationml/2006/main">
   <p:cSld>
     <p:spTree>
@@ -38944,7 +38914,7 @@
             <a:fld id="{C263D6C4-4840-40CC-AC84-17E24B3B7BDE}" type="slidenum">
               <a:rPr lang="en-US" smtClean="0"/>
               <a:pPr/>
-              <a:t>31</a:t>
+              <a:t>30</a:t>
             </a:fld>
             <a:endParaRPr lang="en-US" dirty="0"/>
           </a:p>
@@ -39688,7 +39658,7 @@
 </p:sld>
 </file>
 
-<file path=ppt/slides/slide32.xml><?xml version="1.0" encoding="utf-8"?>
+<file path=ppt/slides/slide31.xml><?xml version="1.0" encoding="utf-8"?>
 <p:sld xmlns:a="http://schemas.openxmlformats.org/drawingml/2006/main" xmlns:r="http://schemas.openxmlformats.org/officeDocument/2006/relationships" xmlns:p="http://schemas.openxmlformats.org/presentationml/2006/main">
   <p:cSld>
     <p:spTree>
@@ -39748,7 +39718,7 @@
             <a:fld id="{C263D6C4-4840-40CC-AC84-17E24B3B7BDE}" type="slidenum">
               <a:rPr lang="en-US" noProof="0" smtClean="0"/>
               <a:pPr/>
-              <a:t>32</a:t>
+              <a:t>31</a:t>
             </a:fld>
             <a:endParaRPr lang="en-US" noProof="0" dirty="0"/>
           </a:p>
@@ -40099,7 +40069,7 @@
 </p:sld>
 </file>
 
-<file path=ppt/slides/slide33.xml><?xml version="1.0" encoding="utf-8"?>
+<file path=ppt/slides/slide32.xml><?xml version="1.0" encoding="utf-8"?>
 <p:sld xmlns:a="http://schemas.openxmlformats.org/drawingml/2006/main" xmlns:r="http://schemas.openxmlformats.org/officeDocument/2006/relationships" xmlns:p="http://schemas.openxmlformats.org/presentationml/2006/main">
   <p:cSld>
     <p:spTree>
@@ -40159,7 +40129,7 @@
             <a:fld id="{C263D6C4-4840-40CC-AC84-17E24B3B7BDE}" type="slidenum">
               <a:rPr lang="en-US" noProof="0" smtClean="0"/>
               <a:pPr/>
-              <a:t>33</a:t>
+              <a:t>32</a:t>
             </a:fld>
             <a:endParaRPr lang="en-US" noProof="0" dirty="0"/>
           </a:p>
@@ -40253,7 +40223,7 @@
 </p:sld>
 </file>
 
-<file path=ppt/slides/slide34.xml><?xml version="1.0" encoding="utf-8"?>
+<file path=ppt/slides/slide33.xml><?xml version="1.0" encoding="utf-8"?>
 <p:sld xmlns:a="http://schemas.openxmlformats.org/drawingml/2006/main" xmlns:r="http://schemas.openxmlformats.org/officeDocument/2006/relationships" xmlns:p="http://schemas.openxmlformats.org/presentationml/2006/main">
   <p:cSld>
     <p:spTree>
@@ -40313,7 +40283,7 @@
             <a:fld id="{C263D6C4-4840-40CC-AC84-17E24B3B7BDE}" type="slidenum">
               <a:rPr lang="en-US" noProof="0" smtClean="0"/>
               <a:pPr/>
-              <a:t>34</a:t>
+              <a:t>33</a:t>
             </a:fld>
             <a:endParaRPr lang="en-US" noProof="0" dirty="0"/>
           </a:p>
@@ -41484,7 +41454,7 @@
 </p:sld>
 </file>
 
-<file path=ppt/slides/slide35.xml><?xml version="1.0" encoding="utf-8"?>
+<file path=ppt/slides/slide34.xml><?xml version="1.0" encoding="utf-8"?>
 <p:sld xmlns:a="http://schemas.openxmlformats.org/drawingml/2006/main" xmlns:r="http://schemas.openxmlformats.org/officeDocument/2006/relationships" xmlns:p="http://schemas.openxmlformats.org/presentationml/2006/main">
   <p:cSld>
     <p:spTree>
@@ -41544,7 +41514,7 @@
             <a:fld id="{C263D6C4-4840-40CC-AC84-17E24B3B7BDE}" type="slidenum">
               <a:rPr lang="en-US" noProof="0" smtClean="0"/>
               <a:pPr/>
-              <a:t>35</a:t>
+              <a:t>34</a:t>
             </a:fld>
             <a:endParaRPr lang="en-US" noProof="0" dirty="0"/>
           </a:p>
@@ -41625,7 +41595,7 @@
 </p:sld>
 </file>
 
-<file path=ppt/slides/slide36.xml><?xml version="1.0" encoding="utf-8"?>
+<file path=ppt/slides/slide35.xml><?xml version="1.0" encoding="utf-8"?>
 <p:sld xmlns:a="http://schemas.openxmlformats.org/drawingml/2006/main" xmlns:r="http://schemas.openxmlformats.org/officeDocument/2006/relationships" xmlns:p="http://schemas.openxmlformats.org/presentationml/2006/main">
   <p:cSld>
     <p:spTree>
@@ -41724,7 +41694,7 @@
                 <a:latin typeface="Times New Roman" panose="02020603050405020304" pitchFamily="18" charset="0"/>
                 <a:cs typeface="Times New Roman" panose="02020603050405020304" pitchFamily="18" charset="0"/>
               </a:rPr>
-              <a:t>Introduction</a:t>
+              <a:t>F-Test</a:t>
             </a:r>
           </a:p>
         </p:txBody>
@@ -41748,232 +41718,6 @@
               <a:rPr lang="en-US" noProof="0" smtClean="0"/>
               <a:pPr/>
               <a:t>4</a:t>
-            </a:fld>
-            <a:endParaRPr lang="en-US" noProof="0" dirty="0"/>
-          </a:p>
-        </p:txBody>
-      </p:sp>
-      <p:sp>
-        <p:nvSpPr>
-          <p:cNvPr id="5" name="TextBox 4"/>
-          <p:cNvSpPr txBox="1"/>
-          <p:nvPr/>
-        </p:nvSpPr>
-        <p:spPr>
-          <a:xfrm>
-            <a:off x="1389184" y="1899138"/>
-            <a:ext cx="8959361" cy="3785652"/>
-          </a:xfrm>
-          <a:prstGeom prst="rect">
-            <a:avLst/>
-          </a:prstGeom>
-          <a:noFill/>
-        </p:spPr>
-        <p:txBody>
-          <a:bodyPr wrap="square" rtlCol="0">
-            <a:spAutoFit/>
-          </a:bodyPr>
-          <a:lstStyle/>
-          <a:p>
-            <a:pPr marL="342900" indent="-342900">
-              <a:buFont typeface="Arial" panose="020B0604020202020204" pitchFamily="34" charset="0"/>
-              <a:buChar char="•"/>
-            </a:pPr>
-            <a:r>
-              <a:rPr lang="en-US" sz="2400" b="1" dirty="0">
-                <a:solidFill>
-                  <a:schemeClr val="bg1"/>
-                </a:solidFill>
-                <a:latin typeface="Times New Roman" panose="02020603050405020304" pitchFamily="18" charset="0"/>
-                <a:cs typeface="Times New Roman" panose="02020603050405020304" pitchFamily="18" charset="0"/>
-              </a:rPr>
-              <a:t>Sample: </a:t>
-            </a:r>
-            <a:r>
-              <a:rPr lang="en-US" sz="2400" dirty="0">
-                <a:solidFill>
-                  <a:schemeClr val="bg1"/>
-                </a:solidFill>
-                <a:latin typeface="Times New Roman" panose="02020603050405020304" pitchFamily="18" charset="0"/>
-                <a:cs typeface="Times New Roman" panose="02020603050405020304" pitchFamily="18" charset="0"/>
-              </a:rPr>
-              <a:t>A subset or small portion of data that is used to make inference about the whole data.</a:t>
-            </a:r>
-          </a:p>
-          <a:p>
-            <a:pPr marL="342900" indent="-342900">
-              <a:buFont typeface="Arial" panose="020B0604020202020204" pitchFamily="34" charset="0"/>
-              <a:buChar char="•"/>
-            </a:pPr>
-            <a:endParaRPr lang="en-US" sz="2400" b="1" dirty="0">
-              <a:solidFill>
-                <a:schemeClr val="bg1"/>
-              </a:solidFill>
-              <a:latin typeface="Times New Roman" panose="02020603050405020304" pitchFamily="18" charset="0"/>
-              <a:cs typeface="Times New Roman" panose="02020603050405020304" pitchFamily="18" charset="0"/>
-            </a:endParaRPr>
-          </a:p>
-          <a:p>
-            <a:pPr marL="342900" indent="-342900">
-              <a:buFont typeface="Arial" panose="020B0604020202020204" pitchFamily="34" charset="0"/>
-              <a:buChar char="•"/>
-            </a:pPr>
-            <a:r>
-              <a:rPr lang="en-US" sz="2400" b="1" dirty="0">
-                <a:solidFill>
-                  <a:schemeClr val="bg1"/>
-                </a:solidFill>
-                <a:latin typeface="Times New Roman" panose="02020603050405020304" pitchFamily="18" charset="0"/>
-                <a:cs typeface="Times New Roman" panose="02020603050405020304" pitchFamily="18" charset="0"/>
-              </a:rPr>
-              <a:t>Hypothesis Testing: </a:t>
-            </a:r>
-            <a:r>
-              <a:rPr lang="en-US" sz="2400" dirty="0">
-                <a:solidFill>
-                  <a:schemeClr val="bg1"/>
-                </a:solidFill>
-                <a:latin typeface="Times New Roman" panose="02020603050405020304" pitchFamily="18" charset="0"/>
-                <a:cs typeface="Times New Roman" panose="02020603050405020304" pitchFamily="18" charset="0"/>
-              </a:rPr>
-              <a:t>A statistical hypothesis is usually a statement about a set of parameters of a population distribution.</a:t>
-            </a:r>
-            <a:r>
-              <a:rPr lang="en-US" dirty="0"/>
-              <a:t> </a:t>
-            </a:r>
-            <a:r>
-              <a:rPr lang="en-US" sz="2400" dirty="0">
-                <a:solidFill>
-                  <a:schemeClr val="bg1"/>
-                </a:solidFill>
-                <a:latin typeface="Times New Roman" panose="02020603050405020304" pitchFamily="18" charset="0"/>
-                <a:cs typeface="Times New Roman" panose="02020603050405020304" pitchFamily="18" charset="0"/>
-              </a:rPr>
-              <a:t>The objective of a statistical test is not to explicitly determine whether or not H</a:t>
-            </a:r>
-            <a:r>
-              <a:rPr lang="en-US" sz="1400" dirty="0">
-                <a:solidFill>
-                  <a:schemeClr val="bg1"/>
-                </a:solidFill>
-                <a:latin typeface="Times New Roman" panose="02020603050405020304" pitchFamily="18" charset="0"/>
-                <a:cs typeface="Times New Roman" panose="02020603050405020304" pitchFamily="18" charset="0"/>
-              </a:rPr>
-              <a:t>0 </a:t>
-            </a:r>
-            <a:r>
-              <a:rPr lang="en-US" sz="2400" dirty="0">
-                <a:solidFill>
-                  <a:schemeClr val="bg1"/>
-                </a:solidFill>
-                <a:latin typeface="Times New Roman" panose="02020603050405020304" pitchFamily="18" charset="0"/>
-                <a:cs typeface="Times New Roman" panose="02020603050405020304" pitchFamily="18" charset="0"/>
-              </a:rPr>
-              <a:t>(Null Hypothesis) is true but rather to determine if its validity is consistent with the resultant data.</a:t>
-            </a:r>
-          </a:p>
-          <a:p>
-            <a:pPr marL="342900" indent="-342900">
-              <a:buFont typeface="Arial" panose="020B0604020202020204" pitchFamily="34" charset="0"/>
-              <a:buChar char="•"/>
-            </a:pPr>
-            <a:endParaRPr lang="en-US" sz="2400" b="1" dirty="0">
-              <a:solidFill>
-                <a:schemeClr val="bg1"/>
-              </a:solidFill>
-              <a:latin typeface="Times New Roman" panose="02020603050405020304" pitchFamily="18" charset="0"/>
-              <a:cs typeface="Times New Roman" panose="02020603050405020304" pitchFamily="18" charset="0"/>
-            </a:endParaRPr>
-          </a:p>
-          <a:p>
-            <a:r>
-              <a:rPr lang="en-US" sz="2400" b="1" dirty="0">
-                <a:solidFill>
-                  <a:schemeClr val="bg1"/>
-                </a:solidFill>
-                <a:latin typeface="Times New Roman" panose="02020603050405020304" pitchFamily="18" charset="0"/>
-                <a:cs typeface="Times New Roman" panose="02020603050405020304" pitchFamily="18" charset="0"/>
-              </a:rPr>
-              <a:t>                </a:t>
-            </a:r>
-          </a:p>
-        </p:txBody>
-      </p:sp>
-    </p:spTree>
-    <p:extLst>
-      <p:ext uri="{BB962C8B-B14F-4D97-AF65-F5344CB8AC3E}">
-        <p14:creationId xmlns:p14="http://schemas.microsoft.com/office/powerpoint/2010/main" val="4116124292"/>
-      </p:ext>
-    </p:extLst>
-  </p:cSld>
-  <p:clrMapOvr>
-    <a:masterClrMapping/>
-  </p:clrMapOvr>
-</p:sld>
-</file>
-
-<file path=ppt/slides/slide5.xml><?xml version="1.0" encoding="utf-8"?>
-<p:sld xmlns:a="http://schemas.openxmlformats.org/drawingml/2006/main" xmlns:r="http://schemas.openxmlformats.org/officeDocument/2006/relationships" xmlns:p="http://schemas.openxmlformats.org/presentationml/2006/main">
-  <p:cSld>
-    <p:spTree>
-      <p:nvGrpSpPr>
-        <p:cNvPr id="1" name=""/>
-        <p:cNvGrpSpPr/>
-        <p:nvPr/>
-      </p:nvGrpSpPr>
-      <p:grpSpPr>
-        <a:xfrm>
-          <a:off x="0" y="0"/>
-          <a:ext cx="0" cy="0"/>
-          <a:chOff x="0" y="0"/>
-          <a:chExt cx="0" cy="0"/>
-        </a:xfrm>
-      </p:grpSpPr>
-      <p:sp>
-        <p:nvSpPr>
-          <p:cNvPr id="2" name="Title 1"/>
-          <p:cNvSpPr>
-            <a:spLocks noGrp="1"/>
-          </p:cNvSpPr>
-          <p:nvPr>
-            <p:ph type="title"/>
-          </p:nvPr>
-        </p:nvSpPr>
-        <p:spPr/>
-        <p:txBody>
-          <a:bodyPr/>
-          <a:lstStyle/>
-          <a:p>
-            <a:r>
-              <a:rPr lang="en-US" dirty="0">
-                <a:latin typeface="Times New Roman" panose="02020603050405020304" pitchFamily="18" charset="0"/>
-                <a:cs typeface="Times New Roman" panose="02020603050405020304" pitchFamily="18" charset="0"/>
-              </a:rPr>
-              <a:t>F-Test</a:t>
-            </a:r>
-          </a:p>
-        </p:txBody>
-      </p:sp>
-      <p:sp>
-        <p:nvSpPr>
-          <p:cNvPr id="3" name="Slide Number Placeholder 2"/>
-          <p:cNvSpPr>
-            <a:spLocks noGrp="1"/>
-          </p:cNvSpPr>
-          <p:nvPr>
-            <p:ph type="sldNum" sz="quarter" idx="12"/>
-          </p:nvPr>
-        </p:nvSpPr>
-        <p:spPr/>
-        <p:txBody>
-          <a:bodyPr/>
-          <a:lstStyle/>
-          <a:p>
-            <a:fld id="{C263D6C4-4840-40CC-AC84-17E24B3B7BDE}" type="slidenum">
-              <a:rPr lang="en-US" noProof="0" smtClean="0"/>
-              <a:pPr/>
-              <a:t>5</a:t>
             </a:fld>
             <a:endParaRPr lang="en-US" noProof="0" dirty="0"/>
           </a:p>
@@ -42391,7 +42135,7 @@
 </p:sld>
 </file>
 
-<file path=ppt/slides/slide6.xml><?xml version="1.0" encoding="utf-8"?>
+<file path=ppt/slides/slide5.xml><?xml version="1.0" encoding="utf-8"?>
 <p:sld xmlns:a="http://schemas.openxmlformats.org/drawingml/2006/main" xmlns:r="http://schemas.openxmlformats.org/officeDocument/2006/relationships" xmlns:p="http://schemas.openxmlformats.org/presentationml/2006/main">
   <p:cSld>
     <p:spTree>
@@ -42426,7 +42170,7 @@
             <a:fld id="{C263D6C4-4840-40CC-AC84-17E24B3B7BDE}" type="slidenum">
               <a:rPr lang="en-US" noProof="0" smtClean="0"/>
               <a:pPr/>
-              <a:t>6</a:t>
+              <a:t>5</a:t>
             </a:fld>
             <a:endParaRPr lang="en-US" noProof="0" dirty="0"/>
           </a:p>
@@ -43119,7 +42863,7 @@
 </p:sld>
 </file>
 
-<file path=ppt/slides/slide7.xml><?xml version="1.0" encoding="utf-8"?>
+<file path=ppt/slides/slide6.xml><?xml version="1.0" encoding="utf-8"?>
 <p:sld xmlns:a="http://schemas.openxmlformats.org/drawingml/2006/main" xmlns:r="http://schemas.openxmlformats.org/officeDocument/2006/relationships" xmlns:p="http://schemas.openxmlformats.org/presentationml/2006/main">
   <p:cSld>
     <p:spTree>
@@ -43255,7 +42999,7 @@
             <a:fld id="{C263D6C4-4840-40CC-AC84-17E24B3B7BDE}" type="slidenum">
               <a:rPr lang="en-US" smtClean="0"/>
               <a:pPr/>
-              <a:t>7</a:t>
+              <a:t>6</a:t>
             </a:fld>
             <a:endParaRPr lang="en-US" dirty="0"/>
           </a:p>
@@ -43286,7 +43030,7 @@
 </p:sld>
 </file>
 
-<file path=ppt/slides/slide8.xml><?xml version="1.0" encoding="utf-8"?>
+<file path=ppt/slides/slide7.xml><?xml version="1.0" encoding="utf-8"?>
 <p:sld xmlns:a="http://schemas.openxmlformats.org/drawingml/2006/main" xmlns:r="http://schemas.openxmlformats.org/officeDocument/2006/relationships" xmlns:p="http://schemas.openxmlformats.org/presentationml/2006/main">
   <p:cSld>
     <p:spTree>
@@ -43321,7 +43065,7 @@
             <a:fld id="{C263D6C4-4840-40CC-AC84-17E24B3B7BDE}" type="slidenum">
               <a:rPr lang="en-US" noProof="0" smtClean="0"/>
               <a:pPr/>
-              <a:t>8</a:t>
+              <a:t>7</a:t>
             </a:fld>
             <a:endParaRPr lang="en-US" noProof="0" dirty="0"/>
           </a:p>
@@ -43540,7 +43284,7 @@
 </p:sld>
 </file>
 
-<file path=ppt/slides/slide9.xml><?xml version="1.0" encoding="utf-8"?>
+<file path=ppt/slides/slide8.xml><?xml version="1.0" encoding="utf-8"?>
 <p:sld xmlns:a="http://schemas.openxmlformats.org/drawingml/2006/main" xmlns:r="http://schemas.openxmlformats.org/officeDocument/2006/relationships" xmlns:p="http://schemas.openxmlformats.org/presentationml/2006/main">
   <p:cSld>
     <p:spTree>
@@ -43605,7 +43349,7 @@
             <a:fld id="{C263D6C4-4840-40CC-AC84-17E24B3B7BDE}" type="slidenum">
               <a:rPr lang="en-US" noProof="0" smtClean="0"/>
               <a:pPr/>
-              <a:t>9</a:t>
+              <a:t>8</a:t>
             </a:fld>
             <a:endParaRPr lang="en-US" noProof="0" dirty="0"/>
           </a:p>
@@ -43960,6 +43704,151 @@
     <p:extLst>
       <p:ext uri="{BB962C8B-B14F-4D97-AF65-F5344CB8AC3E}">
         <p14:creationId xmlns:p14="http://schemas.microsoft.com/office/powerpoint/2010/main" val="1011277756"/>
+      </p:ext>
+    </p:extLst>
+  </p:cSld>
+  <p:clrMapOvr>
+    <a:masterClrMapping/>
+  </p:clrMapOvr>
+</p:sld>
+</file>
+
+<file path=ppt/slides/slide9.xml><?xml version="1.0" encoding="utf-8"?>
+<p:sld xmlns:a="http://schemas.openxmlformats.org/drawingml/2006/main" xmlns:r="http://schemas.openxmlformats.org/officeDocument/2006/relationships" xmlns:p="http://schemas.openxmlformats.org/presentationml/2006/main">
+  <p:cSld>
+    <p:spTree>
+      <p:nvGrpSpPr>
+        <p:cNvPr id="1" name=""/>
+        <p:cNvGrpSpPr/>
+        <p:nvPr/>
+      </p:nvGrpSpPr>
+      <p:grpSpPr>
+        <a:xfrm>
+          <a:off x="0" y="0"/>
+          <a:ext cx="0" cy="0"/>
+          <a:chOff x="0" y="0"/>
+          <a:chExt cx="0" cy="0"/>
+        </a:xfrm>
+      </p:grpSpPr>
+      <p:sp>
+        <p:nvSpPr>
+          <p:cNvPr id="2" name="Title 1"/>
+          <p:cNvSpPr>
+            <a:spLocks noGrp="1"/>
+          </p:cNvSpPr>
+          <p:nvPr>
+            <p:ph type="title"/>
+          </p:nvPr>
+        </p:nvSpPr>
+        <p:spPr>
+          <a:xfrm>
+            <a:off x="444500" y="542925"/>
+            <a:ext cx="11214100" cy="480131"/>
+          </a:xfrm>
+        </p:spPr>
+        <p:txBody>
+          <a:bodyPr/>
+          <a:lstStyle/>
+          <a:p>
+            <a:r>
+              <a:rPr lang="en-US" sz="2800" dirty="0">
+                <a:latin typeface="Times New Roman" panose="02020603050405020304" pitchFamily="18" charset="0"/>
+                <a:cs typeface="Times New Roman" panose="02020603050405020304" pitchFamily="18" charset="0"/>
+              </a:rPr>
+              <a:t>Types of ANOVA</a:t>
+            </a:r>
+          </a:p>
+        </p:txBody>
+      </p:sp>
+      <p:sp>
+        <p:nvSpPr>
+          <p:cNvPr id="3" name="Slide Number Placeholder 2"/>
+          <p:cNvSpPr>
+            <a:spLocks noGrp="1"/>
+          </p:cNvSpPr>
+          <p:nvPr>
+            <p:ph type="sldNum" sz="quarter" idx="12"/>
+          </p:nvPr>
+        </p:nvSpPr>
+        <p:spPr/>
+        <p:txBody>
+          <a:bodyPr/>
+          <a:lstStyle/>
+          <a:p>
+            <a:fld id="{C263D6C4-4840-40CC-AC84-17E24B3B7BDE}" type="slidenum">
+              <a:rPr lang="en-US" noProof="0" smtClean="0"/>
+              <a:pPr/>
+              <a:t>9</a:t>
+            </a:fld>
+            <a:endParaRPr lang="en-US" noProof="0" dirty="0"/>
+          </a:p>
+        </p:txBody>
+      </p:sp>
+      <p:sp>
+        <p:nvSpPr>
+          <p:cNvPr id="4" name="Text Placeholder 3"/>
+          <p:cNvSpPr>
+            <a:spLocks noGrp="1"/>
+          </p:cNvSpPr>
+          <p:nvPr>
+            <p:ph type="body" sz="quarter" idx="13"/>
+          </p:nvPr>
+        </p:nvSpPr>
+        <p:spPr/>
+        <p:txBody>
+          <a:bodyPr/>
+          <a:lstStyle/>
+          <a:p>
+            <a:r>
+              <a:rPr lang="en-US" sz="2400" dirty="0">
+                <a:latin typeface="Times New Roman" panose="02020603050405020304" pitchFamily="18" charset="0"/>
+                <a:cs typeface="Times New Roman" panose="02020603050405020304" pitchFamily="18" charset="0"/>
+              </a:rPr>
+              <a:t>One Way ANOVA</a:t>
+            </a:r>
+          </a:p>
+          <a:p>
+            <a:endParaRPr lang="en-US" sz="2400" dirty="0">
+              <a:latin typeface="Times New Roman" panose="02020603050405020304" pitchFamily="18" charset="0"/>
+              <a:cs typeface="Times New Roman" panose="02020603050405020304" pitchFamily="18" charset="0"/>
+            </a:endParaRPr>
+          </a:p>
+        </p:txBody>
+      </p:sp>
+      <p:pic>
+        <p:nvPicPr>
+          <p:cNvPr id="5" name="Content Placeholder 3">
+            <a:extLst>
+              <a:ext uri="{FF2B5EF4-FFF2-40B4-BE49-F238E27FC236}">
+                <a16:creationId xmlns:a16="http://schemas.microsoft.com/office/drawing/2014/main" id="{8969E46E-97C4-E080-1F0D-50C2454CF966}"/>
+              </a:ext>
+            </a:extLst>
+          </p:cNvPr>
+          <p:cNvPicPr>
+            <a:picLocks noChangeAspect="1"/>
+          </p:cNvPicPr>
+          <p:nvPr/>
+        </p:nvPicPr>
+        <p:blipFill>
+          <a:blip r:embed="rId2"/>
+          <a:stretch>
+            <a:fillRect/>
+          </a:stretch>
+        </p:blipFill>
+        <p:spPr>
+          <a:xfrm>
+            <a:off x="2030218" y="2347545"/>
+            <a:ext cx="7912514" cy="4079775"/>
+          </a:xfrm>
+          <a:prstGeom prst="rect">
+            <a:avLst/>
+          </a:prstGeom>
+        </p:spPr>
+      </p:pic>
+    </p:spTree>
+    <p:extLst>
+      <p:ext uri="{BB962C8B-B14F-4D97-AF65-F5344CB8AC3E}">
+        <p14:creationId xmlns:p14="http://schemas.microsoft.com/office/powerpoint/2010/main" val="3054131739"/>
       </p:ext>
     </p:extLst>
   </p:cSld>
@@ -44761,18 +44650,18 @@
 </file>
 
 <file path=customXml/item1.xml><?xml version="1.0" encoding="utf-8"?>
-<p:properties xmlns:p="http://schemas.microsoft.com/office/2006/metadata/properties" xmlns:xsi="http://www.w3.org/2001/XMLSchema-instance" xmlns:pc="http://schemas.microsoft.com/office/infopath/2007/PartnerControls">
-  <documentManagement/>
-</p:properties>
-</file>
-
-<file path=customXml/item2.xml><?xml version="1.0" encoding="utf-8"?>
 <?mso-contentType ?>
 <FormTemplates xmlns="http://schemas.microsoft.com/sharepoint/v3/contenttype/forms">
   <Display>DocumentLibraryForm</Display>
   <Edit>DocumentLibraryForm</Edit>
   <New>DocumentLibraryForm</New>
 </FormTemplates>
+</file>
+
+<file path=customXml/item2.xml><?xml version="1.0" encoding="utf-8"?>
+<p:properties xmlns:p="http://schemas.microsoft.com/office/2006/metadata/properties" xmlns:xsi="http://www.w3.org/2001/XMLSchema-instance" xmlns:pc="http://schemas.microsoft.com/office/infopath/2007/PartnerControls">
+  <documentManagement/>
+</p:properties>
 </file>
 
 <file path=customXml/item3.xml><?xml version="1.0" encoding="utf-8"?>
@@ -44920,6 +44809,14 @@
 </file>
 
 <file path=customXml/itemProps1.xml><?xml version="1.0" encoding="utf-8"?>
+<ds:datastoreItem xmlns:ds="http://schemas.openxmlformats.org/officeDocument/2006/customXml" ds:itemID="{5B26E0C9-B2AA-42E6-97B6-E1B7D9EAF129}">
+  <ds:schemaRefs>
+    <ds:schemaRef ds:uri="http://schemas.microsoft.com/sharepoint/v3/contenttype/forms"/>
+  </ds:schemaRefs>
+</ds:datastoreItem>
+</file>
+
+<file path=customXml/itemProps2.xml><?xml version="1.0" encoding="utf-8"?>
 <ds:datastoreItem xmlns:ds="http://schemas.openxmlformats.org/officeDocument/2006/customXml" ds:itemID="{F5757914-1161-4661-9696-421FD6935CDD}">
   <ds:schemaRefs>
     <ds:schemaRef ds:uri="http://schemas.microsoft.com/office/infopath/2007/PartnerControls"/>
@@ -44932,14 +44829,6 @@
     <ds:schemaRef ds:uri="http://schemas.openxmlformats.org/package/2006/metadata/core-properties"/>
     <ds:schemaRef ds:uri="16c05727-aa75-4e4a-9b5f-8a80a1165891"/>
     <ds:schemaRef ds:uri="71af3243-3dd4-4a8d-8c0d-dd76da1f02a5"/>
-  </ds:schemaRefs>
-</ds:datastoreItem>
-</file>
-
-<file path=customXml/itemProps2.xml><?xml version="1.0" encoding="utf-8"?>
-<ds:datastoreItem xmlns:ds="http://schemas.openxmlformats.org/officeDocument/2006/customXml" ds:itemID="{5B26E0C9-B2AA-42E6-97B6-E1B7D9EAF129}">
-  <ds:schemaRefs>
-    <ds:schemaRef ds:uri="http://schemas.microsoft.com/sharepoint/v3/contenttype/forms"/>
   </ds:schemaRefs>
 </ds:datastoreItem>
 </file>
